--- a/inst/docs/Lecture9.pptx
+++ b/inst/docs/Lecture9.pptx
@@ -253,7 +253,7 @@
           <a:p>
             <a:fld id="{5BA85917-96BC-A94E-B108-436BB51A4016}" type="datetimeFigureOut">
               <a:rPr lang="en-US" smtClean="0"/>
-              <a:t>4/12/25</a:t>
+              <a:t>4/7/26</a:t>
             </a:fld>
             <a:endParaRPr lang="en-US"/>
           </a:p>
@@ -7526,13 +7526,14 @@
           </a:p>
           <a:p>
             <a:r>
-              <a:rPr lang="en-US" dirty="0" err="1"/>
+              <a:rPr lang="en-US" err="1"/>
               <a:t>Physalia</a:t>
             </a:r>
             <a:r>
-              <a:rPr lang="en-US" dirty="0"/>
-              <a:t> 2025</a:t>
-            </a:r>
+              <a:rPr lang="en-US"/>
+              <a:t> 2026</a:t>
+            </a:r>
+            <a:endParaRPr lang="en-US" dirty="0"/>
           </a:p>
         </p:txBody>
       </p:sp>

--- a/inst/docs/Lecture9.pptx
+++ b/inst/docs/Lecture9.pptx
@@ -253,7 +253,7 @@
           <a:p>
             <a:fld id="{5BA85917-96BC-A94E-B108-436BB51A4016}" type="datetimeFigureOut">
               <a:rPr lang="en-US" smtClean="0"/>
-              <a:t>4/7/26</a:t>
+              <a:t>4/16/26</a:t>
             </a:fld>
             <a:endParaRPr lang="en-US"/>
           </a:p>
@@ -13345,7 +13345,7 @@
 </file>
 
 <file path=ppt/slides/slide14.xml><?xml version="1.0" encoding="utf-8"?>
-<p:sld xmlns:a="http://schemas.openxmlformats.org/drawingml/2006/main" xmlns:r="http://schemas.openxmlformats.org/officeDocument/2006/relationships" xmlns:p="http://schemas.openxmlformats.org/presentationml/2006/main">
+<p:sld xmlns:a="http://schemas.openxmlformats.org/drawingml/2006/main" xmlns:r="http://schemas.openxmlformats.org/officeDocument/2006/relationships" xmlns:p="http://schemas.openxmlformats.org/presentationml/2006/main" show="0">
   <p:cSld>
     <p:spTree>
       <p:nvGrpSpPr>
@@ -14995,7 +14995,7 @@
 </file>
 
 <file path=ppt/slides/slide15.xml><?xml version="1.0" encoding="utf-8"?>
-<p:sld xmlns:a="http://schemas.openxmlformats.org/drawingml/2006/main" xmlns:r="http://schemas.openxmlformats.org/officeDocument/2006/relationships" xmlns:p="http://schemas.openxmlformats.org/presentationml/2006/main">
+<p:sld xmlns:a="http://schemas.openxmlformats.org/drawingml/2006/main" xmlns:r="http://schemas.openxmlformats.org/officeDocument/2006/relationships" xmlns:p="http://schemas.openxmlformats.org/presentationml/2006/main" show="0">
   <p:cSld>
     <p:spTree>
       <p:nvGrpSpPr>
@@ -23132,7 +23132,7 @@
 </file>
 
 <file path=ppt/slides/slide27.xml><?xml version="1.0" encoding="utf-8"?>
-<p:sld xmlns:a="http://schemas.openxmlformats.org/drawingml/2006/main" xmlns:r="http://schemas.openxmlformats.org/officeDocument/2006/relationships" xmlns:p="http://schemas.openxmlformats.org/presentationml/2006/main">
+<p:sld xmlns:a="http://schemas.openxmlformats.org/drawingml/2006/main" xmlns:r="http://schemas.openxmlformats.org/officeDocument/2006/relationships" xmlns:p="http://schemas.openxmlformats.org/presentationml/2006/main" show="0">
   <p:cSld>
     <p:spTree>
       <p:nvGrpSpPr>
@@ -24793,7 +24793,7 @@
 </file>
 
 <file path=ppt/slides/slide28.xml><?xml version="1.0" encoding="utf-8"?>
-<p:sld xmlns:a="http://schemas.openxmlformats.org/drawingml/2006/main" xmlns:r="http://schemas.openxmlformats.org/officeDocument/2006/relationships" xmlns:p="http://schemas.openxmlformats.org/presentationml/2006/main">
+<p:sld xmlns:a="http://schemas.openxmlformats.org/drawingml/2006/main" xmlns:r="http://schemas.openxmlformats.org/officeDocument/2006/relationships" xmlns:p="http://schemas.openxmlformats.org/presentationml/2006/main" show="0">
   <p:cSld>
     <p:spTree>
       <p:nvGrpSpPr>
@@ -26454,7 +26454,7 @@
 </file>
 
 <file path=ppt/slides/slide29.xml><?xml version="1.0" encoding="utf-8"?>
-<p:sld xmlns:a="http://schemas.openxmlformats.org/drawingml/2006/main" xmlns:r="http://schemas.openxmlformats.org/officeDocument/2006/relationships" xmlns:p="http://schemas.openxmlformats.org/presentationml/2006/main">
+<p:sld xmlns:a="http://schemas.openxmlformats.org/drawingml/2006/main" xmlns:r="http://schemas.openxmlformats.org/officeDocument/2006/relationships" xmlns:p="http://schemas.openxmlformats.org/presentationml/2006/main" show="0">
   <p:cSld>
     <p:spTree>
       <p:nvGrpSpPr>
@@ -28329,7 +28329,7 @@
 </file>
 
 <file path=ppt/slides/slide30.xml><?xml version="1.0" encoding="utf-8"?>
-<p:sld xmlns:a="http://schemas.openxmlformats.org/drawingml/2006/main" xmlns:r="http://schemas.openxmlformats.org/officeDocument/2006/relationships" xmlns:p="http://schemas.openxmlformats.org/presentationml/2006/main">
+<p:sld xmlns:a="http://schemas.openxmlformats.org/drawingml/2006/main" xmlns:r="http://schemas.openxmlformats.org/officeDocument/2006/relationships" xmlns:p="http://schemas.openxmlformats.org/presentationml/2006/main" show="0">
   <p:cSld>
     <p:spTree>
       <p:nvGrpSpPr>
@@ -29989,7 +29989,7 @@
 </file>
 
 <file path=ppt/slides/slide31.xml><?xml version="1.0" encoding="utf-8"?>
-<p:sld xmlns:a="http://schemas.openxmlformats.org/drawingml/2006/main" xmlns:r="http://schemas.openxmlformats.org/officeDocument/2006/relationships" xmlns:p="http://schemas.openxmlformats.org/presentationml/2006/main">
+<p:sld xmlns:a="http://schemas.openxmlformats.org/drawingml/2006/main" xmlns:r="http://schemas.openxmlformats.org/officeDocument/2006/relationships" xmlns:p="http://schemas.openxmlformats.org/presentationml/2006/main" show="0">
   <p:cSld>
     <p:spTree>
       <p:nvGrpSpPr>
@@ -40429,7 +40429,7 @@
 </file>
 
 <file path=ppt/slides/slide50.xml><?xml version="1.0" encoding="utf-8"?>
-<p:sld xmlns:a="http://schemas.openxmlformats.org/drawingml/2006/main" xmlns:r="http://schemas.openxmlformats.org/officeDocument/2006/relationships" xmlns:p="http://schemas.openxmlformats.org/presentationml/2006/main">
+<p:sld xmlns:a="http://schemas.openxmlformats.org/drawingml/2006/main" xmlns:r="http://schemas.openxmlformats.org/officeDocument/2006/relationships" xmlns:p="http://schemas.openxmlformats.org/presentationml/2006/main" show="0">
   <p:cSld>
     <p:spTree>
       <p:nvGrpSpPr>
@@ -40607,7 +40607,7 @@
 </file>
 
 <file path=ppt/slides/slide51.xml><?xml version="1.0" encoding="utf-8"?>
-<p:sld xmlns:a="http://schemas.openxmlformats.org/drawingml/2006/main" xmlns:r="http://schemas.openxmlformats.org/officeDocument/2006/relationships" xmlns:p="http://schemas.openxmlformats.org/presentationml/2006/main">
+<p:sld xmlns:a="http://schemas.openxmlformats.org/drawingml/2006/main" xmlns:r="http://schemas.openxmlformats.org/officeDocument/2006/relationships" xmlns:p="http://schemas.openxmlformats.org/presentationml/2006/main" show="0">
   <p:cSld>
     <p:spTree>
       <p:nvGrpSpPr>
